--- a/docs/presentations/beyond-prompting-local-rag.pptx
+++ b/docs/presentations/beyond-prompting-local-rag.pptx
@@ -19892,7 +19892,7 @@
                 <a:ea typeface="Aptos" pitchFamily="34" charset="-122"/>
                 <a:cs typeface="Aptos" pitchFamily="34" charset="-120"/>
               </a:rPr>
-              <a:t>~$210 USD</a:t>
+              <a:t>~$270 USD</a:t>
             </a:r>
             <a:endParaRPr lang="en-US" sz="1050" dirty="0"/>
           </a:p>
@@ -19933,7 +19933,7 @@
                 <a:ea typeface="Aptos" pitchFamily="34" charset="-122"/>
                 <a:cs typeface="Aptos" pitchFamily="34" charset="-120"/>
               </a:rPr>
-              <a:t>Direct prepaid balance deductions ($70 USD) + ~14,000 AI developer credits ($140.00 standard valuation)</a:t>
+              <a:t>Direct prepaid balance deductions ($70 USD) + ~20,000 AI developer credits ($200.00 standard valuation)</a:t>
             </a:r>
             <a:endParaRPr lang="en-US" sz="920" dirty="0"/>
           </a:p>
@@ -20042,7 +20042,7 @@
                 <a:ea typeface="Aptos" pitchFamily="34" charset="-122"/>
                 <a:cs typeface="Aptos" pitchFamily="34" charset="-120"/>
               </a:rPr>
-              <a:t>~45.5M – 47.6M Tokens (estimated)</a:t>
+              <a:t>~65.0M – 68.0M Tokens (estimated)</a:t>
             </a:r>
             <a:endParaRPr lang="en-US" sz="1050" dirty="0"/>
           </a:p>
@@ -20083,7 +20083,7 @@
                 <a:ea typeface="Aptos" pitchFamily="34" charset="-122"/>
                 <a:cs typeface="Aptos" pitchFamily="34" charset="-120"/>
               </a:rPr>
-              <a:t>Prior ~32.5M–34.0M estimate scaled by revised ~14,000-credit usage versus the former 10,000-credit baseline; includes coding-agent context windows, AST refactorings, multi-file inspections, and prompt iteration</a:t>
+              <a:t>Prior ~32.5M–34.0M estimate scaled by revised ~20,000-credit usage versus the former 10,000-credit baseline; includes coding-agent context windows, AST refactorings, multi-file inspections, and prompt iteration</a:t>
             </a:r>
             <a:endParaRPr lang="en-US" sz="920" dirty="0"/>
           </a:p>
@@ -20492,7 +20492,7 @@
                 <a:ea typeface="Aptos" pitchFamily="34" charset="-122"/>
                 <a:cs typeface="Aptos" pitchFamily="34" charset="-120"/>
               </a:rPr>
-              <a:t>~14 – 22 Hours</a:t>
+              <a:t>~22 – 30 Hours</a:t>
             </a:r>
             <a:endParaRPr lang="en-US" sz="1050" dirty="0"/>
           </a:p>
@@ -22388,7 +22388,7 @@
                 <a:ea typeface="Aptos" pitchFamily="34" charset="-122"/>
                 <a:cs typeface="Aptos" pitchFamily="34" charset="-120"/>
               </a:rPr>
-              <a:t>~100x – 140x Cheaper</a:t>
+              <a:t>~44x – 61x Cheaper</a:t>
             </a:r>
             <a:endParaRPr lang="en-US" sz="1100" dirty="0"/>
           </a:p>
@@ -22620,7 +22620,7 @@
                 <a:ea typeface="Aptos" pitchFamily="34" charset="-122"/>
                 <a:cs typeface="Aptos" pitchFamily="34" charset="-120"/>
               </a:rPr>
-              <a:t>~45x – 60x Cheaper</a:t>
+              <a:t>~20x – 26x Cheaper</a:t>
             </a:r>
             <a:endParaRPr lang="en-US" sz="1100" dirty="0"/>
           </a:p>
@@ -22729,7 +22729,7 @@
                 <a:ea typeface="Aptos" pitchFamily="34" charset="-122"/>
                 <a:cs typeface="Aptos" pitchFamily="34" charset="-120"/>
               </a:rPr>
-              <a:t>~14 – 22 hrs</a:t>
+              <a:t>~22 – 30 hrs</a:t>
             </a:r>
             <a:endParaRPr lang="en-US" sz="1100" dirty="0"/>
           </a:p>
@@ -22811,7 +22811,7 @@
                 <a:ea typeface="Aptos" pitchFamily="34" charset="-122"/>
                 <a:cs typeface="Aptos" pitchFamily="34" charset="-120"/>
               </a:rPr>
-              <a:t>~$210 USD</a:t>
+              <a:t>~$270 USD</a:t>
             </a:r>
             <a:endParaRPr lang="en-US" sz="1100" dirty="0"/>
           </a:p>
@@ -22920,7 +22920,7 @@
                 <a:ea typeface="Aptos" pitchFamily="34" charset="-122"/>
                 <a:cs typeface="Aptos" pitchFamily="34" charset="-120"/>
               </a:rPr>
-              <a:t>Capital Efficiency: ~$210 USD represents approximately 98%–99% savings compared with conventional contractor or agency rates.</a:t>
+              <a:t>Capital Efficiency: ~$270 USD represents approximately 98% savings compared with conventional contractor or agency rates.</a:t>
             </a:r>
             <a:endParaRPr lang="en-US" sz="1400" dirty="0"/>
           </a:p>
